--- a/ericka-portfolio.pptx
+++ b/ericka-portfolio.pptx
@@ -157,7 +157,8 @@
 <file path=ppt/revisionInfo.xml><?xml version="1.0" encoding="utf-8"?>
 <p1510:revInfo xmlns:a="http://schemas.openxmlformats.org/drawingml/2006/main" xmlns:r="http://schemas.openxmlformats.org/officeDocument/2006/relationships" xmlns:p1510="http://schemas.microsoft.com/office/powerpoint/2015/10/main">
   <p1510:revLst>
-    <p1510:client id="{2D30664B-3171-4628-B1E8-1C4BB2446085}" v="1" dt="2026-07-24T23:42:48.019"/>
+    <p1510:client id="{1FFC79F2-0F7E-4E38-9C8D-342DD1575157}" v="23" dt="2026-08-09T05:03:18.767"/>
+    <p1510:client id="{B5FDD570-870B-4DE8-B016-B130900F05AB}" v="1" dt="2026-08-09T04:38:59.050"/>
   </p1510:revLst>
 </p1510:revInfo>
 </file>
@@ -167,39 +168,178 @@
   <pc:docChgLst>
     <pc:chgData name="Ericka Parker" userId="5ddf9072005c2d11" providerId="LiveId" clId="{1F83D780-5AA5-49EE-8DE6-723F65EBDCE3}"/>
     <pc:docChg chg="modSld">
-      <pc:chgData name="Ericka Parker" userId="5ddf9072005c2d11" providerId="LiveId" clId="{1F83D780-5AA5-49EE-8DE6-723F65EBDCE3}" dt="2026-07-25T16:57:15.950" v="15" actId="20577"/>
+      <pc:chgData name="Ericka Parker" userId="5ddf9072005c2d11" providerId="LiveId" clId="{1F83D780-5AA5-49EE-8DE6-723F65EBDCE3}" dt="2026-08-09T05:03:23.128" v="301" actId="1076"/>
       <pc:docMkLst>
         <pc:docMk/>
       </pc:docMkLst>
-      <pc:sldChg chg="modSp mod">
-        <pc:chgData name="Ericka Parker" userId="5ddf9072005c2d11" providerId="LiveId" clId="{1F83D780-5AA5-49EE-8DE6-723F65EBDCE3}" dt="2026-07-24T23:42:50.544" v="5" actId="20577"/>
+      <pc:sldChg chg="modSp">
+        <pc:chgData name="Ericka Parker" userId="5ddf9072005c2d11" providerId="LiveId" clId="{1F83D780-5AA5-49EE-8DE6-723F65EBDCE3}" dt="2026-08-09T04:45:34.449" v="7"/>
         <pc:sldMkLst>
           <pc:docMk/>
-          <pc:sldMk cId="0" sldId="256"/>
+          <pc:sldMk cId="0" sldId="257"/>
         </pc:sldMkLst>
         <pc:spChg chg="mod">
-          <ac:chgData name="Ericka Parker" userId="5ddf9072005c2d11" providerId="LiveId" clId="{1F83D780-5AA5-49EE-8DE6-723F65EBDCE3}" dt="2026-07-24T23:42:50.544" v="5" actId="20577"/>
+          <ac:chgData name="Ericka Parker" userId="5ddf9072005c2d11" providerId="LiveId" clId="{1F83D780-5AA5-49EE-8DE6-723F65EBDCE3}" dt="2026-08-09T04:45:34.449" v="7"/>
           <ac:spMkLst>
             <pc:docMk/>
-            <pc:sldMk cId="0" sldId="256"/>
+            <pc:sldMk cId="0" sldId="257"/>
+            <ac:spMk id="6" creationId="{00000000-0000-0000-0000-000000000000}"/>
+          </ac:spMkLst>
+        </pc:spChg>
+      </pc:sldChg>
+      <pc:sldChg chg="modSp mod">
+        <pc:chgData name="Ericka Parker" userId="5ddf9072005c2d11" providerId="LiveId" clId="{1F83D780-5AA5-49EE-8DE6-723F65EBDCE3}" dt="2026-08-09T05:01:31.826" v="296"/>
+        <pc:sldMkLst>
+          <pc:docMk/>
+          <pc:sldMk cId="0" sldId="258"/>
+        </pc:sldMkLst>
+        <pc:spChg chg="mod">
+          <ac:chgData name="Ericka Parker" userId="5ddf9072005c2d11" providerId="LiveId" clId="{1F83D780-5AA5-49EE-8DE6-723F65EBDCE3}" dt="2026-08-09T04:48:55.826" v="230" actId="1076"/>
+          <ac:spMkLst>
+            <pc:docMk/>
+            <pc:sldMk cId="0" sldId="258"/>
+            <ac:spMk id="2" creationId="{00000000-0000-0000-0000-000000000000}"/>
+          </ac:spMkLst>
+        </pc:spChg>
+        <pc:spChg chg="mod">
+          <ac:chgData name="Ericka Parker" userId="5ddf9072005c2d11" providerId="LiveId" clId="{1F83D780-5AA5-49EE-8DE6-723F65EBDCE3}" dt="2026-08-09T05:01:07.332" v="294"/>
+          <ac:spMkLst>
+            <pc:docMk/>
+            <pc:sldMk cId="0" sldId="258"/>
+            <ac:spMk id="5" creationId="{00000000-0000-0000-0000-000000000000}"/>
+          </ac:spMkLst>
+        </pc:spChg>
+        <pc:spChg chg="mod">
+          <ac:chgData name="Ericka Parker" userId="5ddf9072005c2d11" providerId="LiveId" clId="{1F83D780-5AA5-49EE-8DE6-723F65EBDCE3}" dt="2026-08-09T05:01:19.457" v="295"/>
+          <ac:spMkLst>
+            <pc:docMk/>
+            <pc:sldMk cId="0" sldId="258"/>
+            <ac:spMk id="6" creationId="{00000000-0000-0000-0000-000000000000}"/>
+          </ac:spMkLst>
+        </pc:spChg>
+        <pc:spChg chg="mod">
+          <ac:chgData name="Ericka Parker" userId="5ddf9072005c2d11" providerId="LiveId" clId="{1F83D780-5AA5-49EE-8DE6-723F65EBDCE3}" dt="2026-08-09T05:01:31.826" v="296"/>
+          <ac:spMkLst>
+            <pc:docMk/>
+            <pc:sldMk cId="0" sldId="258"/>
+            <ac:spMk id="7" creationId="{00000000-0000-0000-0000-000000000000}"/>
+          </ac:spMkLst>
+        </pc:spChg>
+      </pc:sldChg>
+      <pc:sldChg chg="modSp mod">
+        <pc:chgData name="Ericka Parker" userId="5ddf9072005c2d11" providerId="LiveId" clId="{1F83D780-5AA5-49EE-8DE6-723F65EBDCE3}" dt="2026-08-09T04:50:39.881" v="236" actId="113"/>
+        <pc:sldMkLst>
+          <pc:docMk/>
+          <pc:sldMk cId="0" sldId="259"/>
+        </pc:sldMkLst>
+        <pc:spChg chg="mod">
+          <ac:chgData name="Ericka Parker" userId="5ddf9072005c2d11" providerId="LiveId" clId="{1F83D780-5AA5-49EE-8DE6-723F65EBDCE3}" dt="2026-08-09T04:50:39.881" v="236" actId="113"/>
+          <ac:spMkLst>
+            <pc:docMk/>
+            <pc:sldMk cId="0" sldId="259"/>
+            <ac:spMk id="6" creationId="{00000000-0000-0000-0000-000000000000}"/>
+          </ac:spMkLst>
+        </pc:spChg>
+      </pc:sldChg>
+      <pc:sldChg chg="modSp mod">
+        <pc:chgData name="Ericka Parker" userId="5ddf9072005c2d11" providerId="LiveId" clId="{1F83D780-5AA5-49EE-8DE6-723F65EBDCE3}" dt="2026-08-09T04:52:55.893" v="268" actId="1076"/>
+        <pc:sldMkLst>
+          <pc:docMk/>
+          <pc:sldMk cId="0" sldId="261"/>
+        </pc:sldMkLst>
+        <pc:spChg chg="mod">
+          <ac:chgData name="Ericka Parker" userId="5ddf9072005c2d11" providerId="LiveId" clId="{1F83D780-5AA5-49EE-8DE6-723F65EBDCE3}" dt="2026-08-09T04:52:55.893" v="268" actId="1076"/>
+          <ac:spMkLst>
+            <pc:docMk/>
+            <pc:sldMk cId="0" sldId="261"/>
+            <ac:spMk id="6" creationId="{00000000-0000-0000-0000-000000000000}"/>
+          </ac:spMkLst>
+        </pc:spChg>
+      </pc:sldChg>
+      <pc:sldChg chg="modSp mod">
+        <pc:chgData name="Ericka Parker" userId="5ddf9072005c2d11" providerId="LiveId" clId="{1F83D780-5AA5-49EE-8DE6-723F65EBDCE3}" dt="2026-08-09T05:02:25.059" v="299" actId="20577"/>
+        <pc:sldMkLst>
+          <pc:docMk/>
+          <pc:sldMk cId="0" sldId="262"/>
+        </pc:sldMkLst>
+        <pc:spChg chg="mod">
+          <ac:chgData name="Ericka Parker" userId="5ddf9072005c2d11" providerId="LiveId" clId="{1F83D780-5AA5-49EE-8DE6-723F65EBDCE3}" dt="2026-08-09T04:53:31.973" v="270" actId="2711"/>
+          <ac:spMkLst>
+            <pc:docMk/>
+            <pc:sldMk cId="0" sldId="262"/>
+            <ac:spMk id="5" creationId="{00000000-0000-0000-0000-000000000000}"/>
+          </ac:spMkLst>
+        </pc:spChg>
+        <pc:spChg chg="mod">
+          <ac:chgData name="Ericka Parker" userId="5ddf9072005c2d11" providerId="LiveId" clId="{1F83D780-5AA5-49EE-8DE6-723F65EBDCE3}" dt="2026-08-09T05:02:25.059" v="299" actId="20577"/>
+          <ac:spMkLst>
+            <pc:docMk/>
+            <pc:sldMk cId="0" sldId="262"/>
+            <ac:spMk id="6" creationId="{00000000-0000-0000-0000-000000000000}"/>
+          </ac:spMkLst>
+        </pc:spChg>
+      </pc:sldChg>
+      <pc:sldChg chg="modSp mod">
+        <pc:chgData name="Ericka Parker" userId="5ddf9072005c2d11" providerId="LiveId" clId="{1F83D780-5AA5-49EE-8DE6-723F65EBDCE3}" dt="2026-08-09T04:56:37.553" v="284" actId="2711"/>
+        <pc:sldMkLst>
+          <pc:docMk/>
+          <pc:sldMk cId="0" sldId="263"/>
+        </pc:sldMkLst>
+        <pc:spChg chg="mod">
+          <ac:chgData name="Ericka Parker" userId="5ddf9072005c2d11" providerId="LiveId" clId="{1F83D780-5AA5-49EE-8DE6-723F65EBDCE3}" dt="2026-08-09T04:56:37.553" v="284" actId="2711"/>
+          <ac:spMkLst>
+            <pc:docMk/>
+            <pc:sldMk cId="0" sldId="263"/>
             <ac:spMk id="5" creationId="{00000000-0000-0000-0000-000000000000}"/>
           </ac:spMkLst>
         </pc:spChg>
       </pc:sldChg>
       <pc:sldChg chg="modSp mod">
-        <pc:chgData name="Ericka Parker" userId="5ddf9072005c2d11" providerId="LiveId" clId="{1F83D780-5AA5-49EE-8DE6-723F65EBDCE3}" dt="2026-07-25T16:57:15.950" v="15" actId="20577"/>
+        <pc:chgData name="Ericka Parker" userId="5ddf9072005c2d11" providerId="LiveId" clId="{1F83D780-5AA5-49EE-8DE6-723F65EBDCE3}" dt="2026-08-09T05:03:23.128" v="301" actId="1076"/>
         <pc:sldMkLst>
           <pc:docMk/>
           <pc:sldMk cId="0" sldId="265"/>
         </pc:sldMkLst>
         <pc:spChg chg="mod">
-          <ac:chgData name="Ericka Parker" userId="5ddf9072005c2d11" providerId="LiveId" clId="{1F83D780-5AA5-49EE-8DE6-723F65EBDCE3}" dt="2026-07-25T16:57:15.950" v="15" actId="20577"/>
+          <ac:chgData name="Ericka Parker" userId="5ddf9072005c2d11" providerId="LiveId" clId="{1F83D780-5AA5-49EE-8DE6-723F65EBDCE3}" dt="2026-08-09T04:58:05.157" v="290" actId="1076"/>
+          <ac:spMkLst>
+            <pc:docMk/>
+            <pc:sldMk cId="0" sldId="265"/>
+            <ac:spMk id="6" creationId="{00000000-0000-0000-0000-000000000000}"/>
+          </ac:spMkLst>
+        </pc:spChg>
+        <pc:spChg chg="mod">
+          <ac:chgData name="Ericka Parker" userId="5ddf9072005c2d11" providerId="LiveId" clId="{1F83D780-5AA5-49EE-8DE6-723F65EBDCE3}" dt="2026-08-09T04:58:33.744" v="293" actId="1076"/>
+          <ac:spMkLst>
+            <pc:docMk/>
+            <pc:sldMk cId="0" sldId="265"/>
+            <ac:spMk id="7" creationId="{00000000-0000-0000-0000-000000000000}"/>
+          </ac:spMkLst>
+        </pc:spChg>
+        <pc:spChg chg="mod">
+          <ac:chgData name="Ericka Parker" userId="5ddf9072005c2d11" providerId="LiveId" clId="{1F83D780-5AA5-49EE-8DE6-723F65EBDCE3}" dt="2026-08-09T04:43:52.029" v="6" actId="20577"/>
           <ac:spMkLst>
             <pc:docMk/>
             <pc:sldMk cId="0" sldId="265"/>
             <ac:spMk id="16" creationId="{00000000-0000-0000-0000-000000000000}"/>
           </ac:spMkLst>
         </pc:spChg>
+        <pc:spChg chg="mod">
+          <ac:chgData name="Ericka Parker" userId="5ddf9072005c2d11" providerId="LiveId" clId="{1F83D780-5AA5-49EE-8DE6-723F65EBDCE3}" dt="2026-08-09T05:03:23.128" v="301" actId="1076"/>
+          <ac:spMkLst>
+            <pc:docMk/>
+            <pc:sldMk cId="0" sldId="265"/>
+            <ac:spMk id="17" creationId="{00000000-0000-0000-0000-000000000000}"/>
+          </ac:spMkLst>
+        </pc:spChg>
+        <pc:grpChg chg="mod">
+          <ac:chgData name="Ericka Parker" userId="5ddf9072005c2d11" providerId="LiveId" clId="{1F83D780-5AA5-49EE-8DE6-723F65EBDCE3}" dt="2026-08-09T04:58:01.730" v="289" actId="1076"/>
+          <ac:grpSpMkLst>
+            <pc:docMk/>
+            <pc:sldMk cId="0" sldId="265"/>
+            <ac:grpSpMk id="2" creationId="{00000000-0000-0000-0000-000000000000}"/>
+          </ac:grpSpMkLst>
+        </pc:grpChg>
       </pc:sldChg>
     </pc:docChg>
   </pc:docChgLst>
@@ -386,7 +526,7 @@
             <a:fld id="{1D8BD707-D9CF-40AE-B4C6-C98DA3205C09}" type="datetimeFigureOut">
               <a:rPr lang="en-US" smtClean="0"/>
               <a:pPr/>
-              <a:t>7/25/2026</a:t>
+              <a:t>8/9/2026</a:t>
             </a:fld>
             <a:endParaRPr lang="en-US"/>
           </a:p>
@@ -551,7 +691,7 @@
             <a:fld id="{1D8BD707-D9CF-40AE-B4C6-C98DA3205C09}" type="datetimeFigureOut">
               <a:rPr lang="en-US" smtClean="0"/>
               <a:pPr/>
-              <a:t>7/25/2026</a:t>
+              <a:t>8/9/2026</a:t>
             </a:fld>
             <a:endParaRPr lang="en-US"/>
           </a:p>
@@ -726,7 +866,7 @@
             <a:fld id="{1D8BD707-D9CF-40AE-B4C6-C98DA3205C09}" type="datetimeFigureOut">
               <a:rPr lang="en-US" smtClean="0"/>
               <a:pPr/>
-              <a:t>7/25/2026</a:t>
+              <a:t>8/9/2026</a:t>
             </a:fld>
             <a:endParaRPr lang="en-US"/>
           </a:p>
@@ -891,7 +1031,7 @@
             <a:fld id="{1D8BD707-D9CF-40AE-B4C6-C98DA3205C09}" type="datetimeFigureOut">
               <a:rPr lang="en-US" smtClean="0"/>
               <a:pPr/>
-              <a:t>7/25/2026</a:t>
+              <a:t>8/9/2026</a:t>
             </a:fld>
             <a:endParaRPr lang="en-US"/>
           </a:p>
@@ -1133,7 +1273,7 @@
             <a:fld id="{1D8BD707-D9CF-40AE-B4C6-C98DA3205C09}" type="datetimeFigureOut">
               <a:rPr lang="en-US" smtClean="0"/>
               <a:pPr/>
-              <a:t>7/25/2026</a:t>
+              <a:t>8/9/2026</a:t>
             </a:fld>
             <a:endParaRPr lang="en-US"/>
           </a:p>
@@ -1415,7 +1555,7 @@
             <a:fld id="{1D8BD707-D9CF-40AE-B4C6-C98DA3205C09}" type="datetimeFigureOut">
               <a:rPr lang="en-US" smtClean="0"/>
               <a:pPr/>
-              <a:t>7/25/2026</a:t>
+              <a:t>8/9/2026</a:t>
             </a:fld>
             <a:endParaRPr lang="en-US"/>
           </a:p>
@@ -1831,7 +1971,7 @@
             <a:fld id="{1D8BD707-D9CF-40AE-B4C6-C98DA3205C09}" type="datetimeFigureOut">
               <a:rPr lang="en-US" smtClean="0"/>
               <a:pPr/>
-              <a:t>7/25/2026</a:t>
+              <a:t>8/9/2026</a:t>
             </a:fld>
             <a:endParaRPr lang="en-US"/>
           </a:p>
@@ -1945,7 +2085,7 @@
             <a:fld id="{1D8BD707-D9CF-40AE-B4C6-C98DA3205C09}" type="datetimeFigureOut">
               <a:rPr lang="en-US" smtClean="0"/>
               <a:pPr/>
-              <a:t>7/25/2026</a:t>
+              <a:t>8/9/2026</a:t>
             </a:fld>
             <a:endParaRPr lang="en-US"/>
           </a:p>
@@ -2037,7 +2177,7 @@
             <a:fld id="{1D8BD707-D9CF-40AE-B4C6-C98DA3205C09}" type="datetimeFigureOut">
               <a:rPr lang="en-US" smtClean="0"/>
               <a:pPr/>
-              <a:t>7/25/2026</a:t>
+              <a:t>8/9/2026</a:t>
             </a:fld>
             <a:endParaRPr lang="en-US"/>
           </a:p>
@@ -2309,7 +2449,7 @@
             <a:fld id="{1D8BD707-D9CF-40AE-B4C6-C98DA3205C09}" type="datetimeFigureOut">
               <a:rPr lang="en-US" smtClean="0"/>
               <a:pPr/>
-              <a:t>7/25/2026</a:t>
+              <a:t>8/9/2026</a:t>
             </a:fld>
             <a:endParaRPr lang="en-US"/>
           </a:p>
@@ -2558,7 +2698,7 @@
             <a:fld id="{1D8BD707-D9CF-40AE-B4C6-C98DA3205C09}" type="datetimeFigureOut">
               <a:rPr lang="en-US" smtClean="0"/>
               <a:pPr/>
-              <a:t>7/25/2026</a:t>
+              <a:t>8/9/2026</a:t>
             </a:fld>
             <a:endParaRPr lang="en-US"/>
           </a:p>
@@ -2766,7 +2906,7 @@
             <a:fld id="{1D8BD707-D9CF-40AE-B4C6-C98DA3205C09}" type="datetimeFigureOut">
               <a:rPr lang="en-US" smtClean="0"/>
               <a:pPr/>
-              <a:t>7/25/2026</a:t>
+              <a:t>8/9/2026</a:t>
             </a:fld>
             <a:endParaRPr lang="en-US"/>
           </a:p>
@@ -3240,7 +3380,7 @@
               </a:lnSpc>
             </a:pPr>
             <a:r>
-              <a:rPr lang="en-US" sz="6750" b="1">
+              <a:rPr lang="en-US" sz="6750" b="1" dirty="0">
                 <a:solidFill>
                   <a:srgbClr val="1C1917"/>
                 </a:solidFill>
@@ -3263,61 +3403,45 @@
         <p:spPr>
           <a:xfrm>
             <a:off x="8148507" y="3823335"/>
-            <a:ext cx="9453693" cy="2061077"/>
+            <a:ext cx="9341259" cy="2638158"/>
           </a:xfrm>
           <a:prstGeom prst="rect">
             <a:avLst/>
           </a:prstGeom>
         </p:spPr>
         <p:txBody>
-          <a:bodyPr wrap="square" lIns="0" tIns="0" rIns="0" bIns="0" rtlCol="0" anchor="t">
+          <a:bodyPr lIns="0" tIns="0" rIns="0" bIns="0" rtlCol="0" anchor="t">
             <a:spAutoFit/>
           </a:bodyPr>
           <a:lstStyle/>
           <a:p>
-            <a:pPr>
-              <a:lnSpc>
-                <a:spcPts val="4050"/>
-              </a:lnSpc>
-            </a:pPr>
-            <a:r>
-              <a:rPr lang="en-US" sz="2800" dirty="0"/>
-              <a:t>HR </a:t>
-            </a:r>
-            <a:r>
-              <a:rPr lang="en-US" sz="2800"/>
-              <a:t>Operations Specialist</a:t>
-            </a:r>
-          </a:p>
-          <a:p>
-            <a:pPr>
-              <a:lnSpc>
-                <a:spcPts val="4050"/>
-              </a:lnSpc>
-            </a:pPr>
-            <a:r>
-              <a:rPr lang="en-US" sz="2700" b="1" spc="178">
-                <a:solidFill>
-                  <a:srgbClr val="0891B2"/>
-                </a:solidFill>
-                <a:latin typeface="Canva Sans Bold"/>
-                <a:ea typeface="Canva Sans Bold"/>
-                <a:cs typeface="Canva Sans Bold"/>
-                <a:sym typeface="Canva Sans Bold"/>
-              </a:rPr>
-              <a:t>Strategic </a:t>
-            </a:r>
-            <a:r>
-              <a:rPr lang="en-US" sz="2700" b="1" spc="178" dirty="0">
-                <a:solidFill>
-                  <a:srgbClr val="0891B2"/>
-                </a:solidFill>
-                <a:latin typeface="Canva Sans Bold"/>
-                <a:ea typeface="Canva Sans Bold"/>
-                <a:cs typeface="Canva Sans Bold"/>
-                <a:sym typeface="Canva Sans Bold"/>
-              </a:rPr>
-              <a:t>Executive Support | Business Operations | Confidential Executive Partnership</a:t>
+            <a:r>
+              <a:rPr lang="en-US" sz="2800" b="1" dirty="0">
+                <a:solidFill>
+                  <a:schemeClr val="accent5"/>
+                </a:solidFill>
+                <a:latin typeface="Canva Sans Bold" panose="020B0604020202020204" charset="0"/>
+              </a:rPr>
+              <a:t>EXECUTIVE INTEGRATOR • OPERATIONAL LEADER</a:t>
+            </a:r>
+          </a:p>
+          <a:p>
+            <a:endParaRPr lang="en-US" sz="2800" b="1" dirty="0">
+              <a:solidFill>
+                <a:schemeClr val="accent5"/>
+              </a:solidFill>
+              <a:latin typeface="Canva Sans Bold" panose="020B0604020202020204" charset="0"/>
+            </a:endParaRPr>
+          </a:p>
+          <a:p>
+            <a:r>
+              <a:rPr lang="en-US" sz="2800" b="1" dirty="0">
+                <a:solidFill>
+                  <a:schemeClr val="accent5"/>
+                </a:solidFill>
+                <a:latin typeface="Canva Sans Bold" panose="020B0604020202020204" charset="0"/>
+              </a:rPr>
+              <a:t>Strategic Executive Support | Program &amp; Business Operations | Process Improvement | People &amp; Systems</a:t>
             </a:r>
           </a:p>
           <a:p>
@@ -3379,7 +3503,7 @@
         </p:nvGrpSpPr>
         <p:grpSpPr>
           <a:xfrm>
-            <a:off x="1028700" y="2012452"/>
+            <a:off x="646379" y="1952398"/>
             <a:ext cx="4808466" cy="4146023"/>
             <a:chOff x="0" y="0"/>
             <a:chExt cx="6411288" cy="5528031"/>
@@ -3489,7 +3613,7 @@
         <p:spPr>
           <a:xfrm>
             <a:off x="1028700" y="1231438"/>
-            <a:ext cx="2963754" cy="600039"/>
+            <a:ext cx="3616523" cy="600075"/>
           </a:xfrm>
           <a:prstGeom prst="rect">
             <a:avLst/>
@@ -3507,7 +3631,7 @@
               </a:lnSpc>
             </a:pPr>
             <a:r>
-              <a:rPr lang="en-US" sz="4050" b="1" dirty="0">
+              <a:rPr lang="en-US" sz="4050" b="1">
                 <a:solidFill>
                   <a:srgbClr val="1C1917"/>
                 </a:solidFill>
@@ -3516,7 +3640,7 @@
                 <a:cs typeface="Montserrat Bold"/>
                 <a:sym typeface="Montserrat Bold"/>
               </a:rPr>
-              <a:t>Thank you.</a:t>
+              <a:t>Let’s connect</a:t>
             </a:r>
           </a:p>
         </p:txBody>
@@ -3529,36 +3653,46 @@
         </p:nvSpPr>
         <p:spPr>
           <a:xfrm>
-            <a:off x="1028700" y="6178975"/>
-            <a:ext cx="4629150" cy="895386"/>
+            <a:off x="488875" y="6212295"/>
+            <a:ext cx="5633002" cy="887487"/>
           </a:xfrm>
           <a:prstGeom prst="rect">
             <a:avLst/>
           </a:prstGeom>
         </p:spPr>
         <p:txBody>
-          <a:bodyPr lIns="0" tIns="0" rIns="0" bIns="0" rtlCol="0" anchor="t">
+          <a:bodyPr wrap="square" lIns="0" tIns="0" rIns="0" bIns="0" rtlCol="0" anchor="t">
             <a:spAutoFit/>
           </a:bodyPr>
           <a:lstStyle/>
           <a:p>
-            <a:pPr algn="l">
+            <a:pPr>
               <a:lnSpc>
                 <a:spcPts val="3600"/>
               </a:lnSpc>
             </a:pPr>
             <a:r>
-              <a:rPr lang="en-US" sz="2250" b="1">
-                <a:solidFill>
-                  <a:srgbClr val="0891B2"/>
-                </a:solidFill>
-                <a:latin typeface="Inter Bold"/>
-                <a:ea typeface="Inter Bold"/>
-                <a:cs typeface="Inter Bold"/>
-                <a:sym typeface="Inter Bold"/>
-              </a:rPr>
-              <a:t>I would love to continue this conversation.</a:t>
-            </a:r>
+              <a:rPr lang="en-US" sz="2400" dirty="0">
+                <a:solidFill>
+                  <a:schemeClr val="accent5">
+                    <a:lumMod val="75000"/>
+                  </a:schemeClr>
+                </a:solidFill>
+                <a:latin typeface="Canva Sans Bold" panose="020B0604020202020204" charset="0"/>
+              </a:rPr>
+              <a:t>Let's build something meaningful together.</a:t>
+            </a:r>
+            <a:endParaRPr lang="en-US" sz="2250" b="1" dirty="0">
+              <a:solidFill>
+                <a:schemeClr val="accent5">
+                  <a:lumMod val="75000"/>
+                </a:schemeClr>
+              </a:solidFill>
+              <a:latin typeface="Canva Sans Bold" panose="020B0604020202020204" charset="0"/>
+              <a:ea typeface="Inter Bold"/>
+              <a:cs typeface="Inter Bold"/>
+              <a:sym typeface="Inter Bold"/>
+            </a:endParaRPr>
           </a:p>
         </p:txBody>
       </p:sp>
@@ -3570,8 +3704,8 @@
         </p:nvSpPr>
         <p:spPr>
           <a:xfrm>
-            <a:off x="1028700" y="7213381"/>
-            <a:ext cx="4949689" cy="2030820"/>
+            <a:off x="488875" y="7478283"/>
+            <a:ext cx="5176354" cy="1618456"/>
           </a:xfrm>
           <a:prstGeom prst="rect">
             <a:avLst/>
@@ -3583,23 +3717,24 @@
           </a:bodyPr>
           <a:lstStyle/>
           <a:p>
-            <a:pPr algn="l">
+            <a:pPr>
               <a:lnSpc>
                 <a:spcPts val="3240"/>
               </a:lnSpc>
             </a:pPr>
             <a:r>
-              <a:rPr lang="en-US" sz="2025">
-                <a:solidFill>
-                  <a:srgbClr val="44403C"/>
-                </a:solidFill>
-                <a:latin typeface="Inter"/>
-                <a:ea typeface="Inter"/>
-                <a:cs typeface="Inter"/>
-                <a:sym typeface="Inter"/>
-              </a:rPr>
-              <a:t>Thank you for taking the time to review my profile. I am available for interview, further discussion, or a brief introductory call at your convenience. I look forward to the possibility of working together.</a:t>
-            </a:r>
+              <a:rPr lang="en-US" sz="2400" dirty="0"/>
+              <a:t>I'm energized by opportunities to connect people, processes, systems and technology while helping organizations operate more effectively.</a:t>
+            </a:r>
+            <a:endParaRPr lang="en-US" sz="2025" dirty="0">
+              <a:solidFill>
+                <a:srgbClr val="44403C"/>
+              </a:solidFill>
+              <a:latin typeface="Inter"/>
+              <a:ea typeface="Inter"/>
+              <a:cs typeface="Inter"/>
+              <a:sym typeface="Inter"/>
+            </a:endParaRPr>
           </a:p>
         </p:txBody>
       </p:sp>
@@ -3898,7 +4033,7 @@
         </p:nvSpPr>
         <p:spPr>
           <a:xfrm>
-            <a:off x="11258550" y="8968902"/>
+            <a:off x="6143625" y="9610725"/>
             <a:ext cx="6000750" cy="282929"/>
           </a:xfrm>
           <a:prstGeom prst="rect">
@@ -3961,7 +4096,7 @@
               </a:spcBef>
             </a:pPr>
             <a:r>
-              <a:rPr lang="en-US" sz="2250" b="1">
+              <a:rPr lang="en-US" sz="2250" b="1" dirty="0">
                 <a:solidFill>
                   <a:srgbClr val="000000"/>
                 </a:solidFill>
@@ -4159,8 +4294,8 @@
         </p:nvSpPr>
         <p:spPr>
           <a:xfrm>
-            <a:off x="11765026" y="6193299"/>
-            <a:ext cx="5049144" cy="1695450"/>
+            <a:off x="11663706" y="6574456"/>
+            <a:ext cx="6095293" cy="1278620"/>
           </a:xfrm>
           <a:prstGeom prst="rect">
             <a:avLst/>
@@ -4181,17 +4316,18 @@
               </a:spcBef>
             </a:pPr>
             <a:r>
-              <a:rPr lang="en-US" sz="2250">
-                <a:solidFill>
-                  <a:srgbClr val="000000"/>
-                </a:solidFill>
-                <a:latin typeface="Inter"/>
-                <a:ea typeface="Inter"/>
-                <a:cs typeface="Inter"/>
-                <a:sym typeface="Inter"/>
-              </a:rPr>
-              <a:t>I create organized, efficient, and trusted executive environments where leaders can focus on what matters most.</a:t>
-            </a:r>
+              <a:rPr lang="en-US" sz="2400" dirty="0"/>
+              <a:t>I create clarity, strengthen operations and build trusted partnerships so leaders and teams can focus on what matters most.</a:t>
+            </a:r>
+            <a:endParaRPr lang="en-US" sz="2250" dirty="0">
+              <a:solidFill>
+                <a:srgbClr val="000000"/>
+              </a:solidFill>
+              <a:latin typeface="Inter"/>
+              <a:ea typeface="Inter"/>
+              <a:cs typeface="Inter"/>
+              <a:sym typeface="Inter"/>
+            </a:endParaRPr>
           </a:p>
         </p:txBody>
       </p:sp>
@@ -4387,7 +4523,7 @@
         <p:spPr>
           <a:xfrm>
             <a:off x="885825" y="2877337"/>
-            <a:ext cx="8258175" cy="3409950"/>
+            <a:ext cx="8258175" cy="2586670"/>
           </a:xfrm>
           <a:prstGeom prst="rect">
             <a:avLst/>
@@ -4408,17 +4544,18 @@
               </a:spcBef>
             </a:pPr>
             <a:r>
-              <a:rPr lang="en-US" sz="2250" b="1">
-                <a:solidFill>
-                  <a:srgbClr val="000000"/>
-                </a:solidFill>
-                <a:latin typeface="Inter Bold"/>
-                <a:ea typeface="Inter Bold"/>
-                <a:cs typeface="Inter Bold"/>
-                <a:sym typeface="Inter Bold"/>
-              </a:rPr>
-              <a:t>Strategic administrative professional with more than 10 years of experience supporting executive leadership, coordinating business operations, managing confidential information, and ensuring seamless day-to-day executive operations. Recognized for anticipating leadership needs, maintaining exceptional organizational standards, and creating an executive environment where leaders can focus on strategic priorities.</a:t>
-            </a:r>
+              <a:rPr lang="en-US" sz="2400" dirty="0"/>
+              <a:t>Operational leader and executive partner with 10+ years of experience connecting people, processes, systems, and leadership priorities. Experienced in program and business operations, executive support, process improvement, team leadership, financial stewardship, and cross-functional coordination within complex, highly regulated environments.</a:t>
+            </a:r>
+            <a:endParaRPr lang="en-US" sz="2250" dirty="0">
+              <a:solidFill>
+                <a:srgbClr val="000000"/>
+              </a:solidFill>
+              <a:latin typeface="Inter"/>
+              <a:ea typeface="Inter"/>
+              <a:cs typeface="Inter"/>
+              <a:sym typeface="Inter"/>
+            </a:endParaRPr>
           </a:p>
         </p:txBody>
       </p:sp>
@@ -4457,7 +4594,60 @@
       </p:grpSpPr>
       <p:sp>
         <p:nvSpPr>
-          <p:cNvPr id="2" name="TextBox 2"/>
+          <p:cNvPr id="2" name="Freeform 2"/>
+          <p:cNvSpPr/>
+          <p:nvPr/>
+        </p:nvSpPr>
+        <p:spPr>
+          <a:xfrm>
+            <a:off x="13383556" y="497160"/>
+            <a:ext cx="3848100" cy="2342789"/>
+          </a:xfrm>
+          <a:custGeom>
+            <a:avLst/>
+            <a:gdLst/>
+            <a:ahLst/>
+            <a:cxnLst/>
+            <a:rect l="l" t="t" r="r" b="b"/>
+            <a:pathLst>
+              <a:path w="5001268" h="3325843">
+                <a:moveTo>
+                  <a:pt x="0" y="0"/>
+                </a:moveTo>
+                <a:lnTo>
+                  <a:pt x="5001268" y="0"/>
+                </a:lnTo>
+                <a:lnTo>
+                  <a:pt x="5001268" y="3325844"/>
+                </a:lnTo>
+                <a:lnTo>
+                  <a:pt x="0" y="3325844"/>
+                </a:lnTo>
+                <a:lnTo>
+                  <a:pt x="0" y="0"/>
+                </a:lnTo>
+                <a:close/>
+              </a:path>
+            </a:pathLst>
+          </a:custGeom>
+          <a:blipFill>
+            <a:blip r:embed="rId2"/>
+            <a:stretch>
+              <a:fillRect/>
+            </a:stretch>
+          </a:blipFill>
+        </p:spPr>
+        <p:txBody>
+          <a:bodyPr/>
+          <a:lstStyle/>
+          <a:p>
+            <a:endParaRPr lang="en-US"/>
+          </a:p>
+        </p:txBody>
+      </p:sp>
+      <p:sp>
+        <p:nvSpPr>
+          <p:cNvPr id="3" name="TextBox 3"/>
           <p:cNvSpPr txBox="1"/>
           <p:nvPr/>
         </p:nvSpPr>
@@ -4498,7 +4688,7 @@
       </p:sp>
       <p:sp>
         <p:nvSpPr>
-          <p:cNvPr id="3" name="TextBox 3"/>
+          <p:cNvPr id="4" name="TextBox 4"/>
           <p:cNvSpPr txBox="1"/>
           <p:nvPr/>
         </p:nvSpPr>
@@ -4542,14 +4732,14 @@
       </p:sp>
       <p:sp>
         <p:nvSpPr>
-          <p:cNvPr id="4" name="TextBox 4"/>
+          <p:cNvPr id="5" name="TextBox 5"/>
           <p:cNvSpPr txBox="1"/>
           <p:nvPr/>
         </p:nvSpPr>
         <p:spPr>
           <a:xfrm>
-            <a:off x="299135" y="3022306"/>
-            <a:ext cx="4634807" cy="2981325"/>
+            <a:off x="299135" y="3493870"/>
+            <a:ext cx="4634807" cy="3874843"/>
           </a:xfrm>
           <a:prstGeom prst="rect">
             <a:avLst/>
@@ -4570,7 +4760,7 @@
               </a:spcBef>
             </a:pPr>
             <a:r>
-              <a:rPr lang="en-US" sz="2250" b="1">
+              <a:rPr lang="en-US" sz="2250" b="1" dirty="0">
                 <a:solidFill>
                   <a:srgbClr val="000000"/>
                 </a:solidFill>
@@ -4579,7 +4769,7 @@
                 <a:cs typeface="Inter Bold"/>
                 <a:sym typeface="Inter Bold"/>
               </a:rPr>
-              <a:t>Executive Support</a:t>
+              <a:t>Executive Partnership</a:t>
             </a:r>
           </a:p>
           <a:p>
@@ -4591,7 +4781,7 @@
                 <a:spcPct val="0"/>
               </a:spcBef>
             </a:pPr>
-            <a:endParaRPr lang="en-US" sz="2250" b="1">
+            <a:endParaRPr lang="en-US" sz="2250" b="1" dirty="0">
               <a:solidFill>
                 <a:srgbClr val="000000"/>
               </a:solidFill>
@@ -4611,160 +4801,52 @@
               </a:spcBef>
             </a:pPr>
             <a:r>
-              <a:rPr lang="en-US" sz="2250" b="1">
-                <a:solidFill>
-                  <a:srgbClr val="000000"/>
-                </a:solidFill>
-                <a:latin typeface="Inter Bold"/>
-                <a:ea typeface="Inter Bold"/>
-                <a:cs typeface="Inter Bold"/>
-                <a:sym typeface="Inter Bold"/>
-              </a:rPr>
-              <a:t>✔ Executive calendars</a:t>
-            </a:r>
-          </a:p>
-          <a:p>
-            <a:pPr algn="ctr">
-              <a:lnSpc>
-                <a:spcPts val="3375"/>
-              </a:lnSpc>
-              <a:spcBef>
-                <a:spcPct val="0"/>
-              </a:spcBef>
-            </a:pPr>
-            <a:r>
-              <a:rPr lang="en-US" sz="2250" b="1">
-                <a:solidFill>
-                  <a:srgbClr val="000000"/>
-                </a:solidFill>
-                <a:latin typeface="Inter Bold"/>
-                <a:ea typeface="Inter Bold"/>
-                <a:cs typeface="Inter Bold"/>
-                <a:sym typeface="Inter Bold"/>
-              </a:rPr>
-              <a:t>✔ Board meetings</a:t>
-            </a:r>
-          </a:p>
-          <a:p>
-            <a:pPr algn="ctr">
-              <a:lnSpc>
-                <a:spcPts val="3375"/>
-              </a:lnSpc>
-              <a:spcBef>
-                <a:spcPct val="0"/>
-              </a:spcBef>
-            </a:pPr>
-            <a:r>
-              <a:rPr lang="en-US" sz="2250" b="1">
-                <a:solidFill>
-                  <a:srgbClr val="000000"/>
-                </a:solidFill>
-                <a:latin typeface="Inter Bold"/>
-                <a:ea typeface="Inter Bold"/>
-                <a:cs typeface="Inter Bold"/>
-                <a:sym typeface="Inter Bold"/>
-              </a:rPr>
-              <a:t>✔ Confidential information</a:t>
-            </a:r>
-          </a:p>
-          <a:p>
-            <a:pPr algn="ctr">
-              <a:lnSpc>
-                <a:spcPts val="3375"/>
-              </a:lnSpc>
-              <a:spcBef>
-                <a:spcPct val="0"/>
-              </a:spcBef>
-            </a:pPr>
-            <a:r>
-              <a:rPr lang="en-US" sz="2250" b="1">
-                <a:solidFill>
-                  <a:srgbClr val="000000"/>
-                </a:solidFill>
-                <a:latin typeface="Inter Bold"/>
-                <a:ea typeface="Inter Bold"/>
-                <a:cs typeface="Inter Bold"/>
-                <a:sym typeface="Inter Bold"/>
-              </a:rPr>
-              <a:t>✔ Travel</a:t>
-            </a:r>
-          </a:p>
-          <a:p>
-            <a:pPr algn="ctr">
-              <a:lnSpc>
-                <a:spcPts val="3375"/>
-              </a:lnSpc>
-              <a:spcBef>
-                <a:spcPct val="0"/>
-              </a:spcBef>
-            </a:pPr>
-            <a:r>
-              <a:rPr lang="en-US" sz="2250" b="1">
-                <a:solidFill>
-                  <a:srgbClr val="000000"/>
-                </a:solidFill>
-                <a:latin typeface="Inter Bold"/>
-                <a:ea typeface="Inter Bold"/>
-                <a:cs typeface="Inter Bold"/>
-                <a:sym typeface="Inter Bold"/>
-              </a:rPr>
-              <a:t>✔ Executive communications</a:t>
-            </a:r>
-          </a:p>
-        </p:txBody>
-      </p:sp>
-      <p:sp>
-        <p:nvSpPr>
-          <p:cNvPr id="5" name="TextBox 5"/>
-          <p:cNvSpPr txBox="1"/>
-          <p:nvPr/>
-        </p:nvSpPr>
-        <p:spPr>
-          <a:xfrm>
-            <a:off x="5799794" y="3022306"/>
-            <a:ext cx="4634807" cy="3409950"/>
-          </a:xfrm>
-          <a:prstGeom prst="rect">
-            <a:avLst/>
-          </a:prstGeom>
-        </p:spPr>
-        <p:txBody>
-          <a:bodyPr lIns="0" tIns="0" rIns="0" bIns="0" rtlCol="0" anchor="t">
-            <a:spAutoFit/>
-          </a:bodyPr>
-          <a:lstStyle/>
-          <a:p>
-            <a:pPr algn="ctr">
-              <a:lnSpc>
-                <a:spcPts val="3375"/>
-              </a:lnSpc>
-              <a:spcBef>
-                <a:spcPct val="0"/>
-              </a:spcBef>
-            </a:pPr>
-            <a:r>
-              <a:rPr lang="en-US" sz="2250" b="1">
-                <a:solidFill>
-                  <a:srgbClr val="000000"/>
-                </a:solidFill>
-                <a:latin typeface="Inter Bold"/>
-                <a:ea typeface="Inter Bold"/>
-                <a:cs typeface="Inter Bold"/>
-                <a:sym typeface="Inter Bold"/>
-              </a:rPr>
-              <a:t>Operations</a:t>
-            </a:r>
-          </a:p>
-          <a:p>
-            <a:pPr algn="ctr">
-              <a:lnSpc>
-                <a:spcPts val="3375"/>
-              </a:lnSpc>
-              <a:spcBef>
-                <a:spcPct val="0"/>
-              </a:spcBef>
-            </a:pPr>
-            <a:endParaRPr lang="en-US" sz="2250" b="1">
+              <a:rPr lang="en-US" sz="2400" dirty="0"/>
+              <a:t>Calendar Management</a:t>
+            </a:r>
+            <a:br>
+              <a:rPr lang="en-US" sz="2400" dirty="0"/>
+            </a:br>
+            <a:r>
+              <a:rPr lang="en-US" sz="2400" dirty="0"/>
+              <a:t>Executive Communications</a:t>
+            </a:r>
+            <a:br>
+              <a:rPr lang="en-US" sz="2400" dirty="0"/>
+            </a:br>
+            <a:r>
+              <a:rPr lang="en-US" sz="2400" dirty="0"/>
+              <a:t>Board Support</a:t>
+            </a:r>
+            <a:br>
+              <a:rPr lang="en-US" sz="2400" dirty="0"/>
+            </a:br>
+            <a:r>
+              <a:rPr lang="en-US" sz="2400" dirty="0"/>
+              <a:t>Confidential Information</a:t>
+            </a:r>
+            <a:br>
+              <a:rPr lang="en-US" sz="2400" dirty="0"/>
+            </a:br>
+            <a:r>
+              <a:rPr lang="en-US" sz="2400" dirty="0"/>
+              <a:t>Travel Coordination</a:t>
+            </a:r>
+            <a:br>
+              <a:rPr lang="en-US" sz="2400" dirty="0"/>
+            </a:br>
+            <a:r>
+              <a:rPr lang="en-US" sz="2400" dirty="0"/>
+              <a:t>Priority Management</a:t>
+            </a:r>
+            <a:br>
+              <a:rPr lang="en-US" sz="2400" dirty="0"/>
+            </a:br>
+            <a:r>
+              <a:rPr lang="en-US" sz="2400" dirty="0"/>
+              <a:t>Leadership Coordination</a:t>
+            </a:r>
+            <a:endParaRPr lang="en-US" sz="2250" b="1" dirty="0">
               <a:solidFill>
                 <a:srgbClr val="000000"/>
               </a:solidFill>
@@ -4774,6 +4856,28 @@
               <a:sym typeface="Inter Bold"/>
             </a:endParaRPr>
           </a:p>
+        </p:txBody>
+      </p:sp>
+      <p:sp>
+        <p:nvSpPr>
+          <p:cNvPr id="6" name="TextBox 6"/>
+          <p:cNvSpPr txBox="1"/>
+          <p:nvPr/>
+        </p:nvSpPr>
+        <p:spPr>
+          <a:xfrm>
+            <a:off x="6141515" y="3493870"/>
+            <a:ext cx="4634807" cy="5192191"/>
+          </a:xfrm>
+          <a:prstGeom prst="rect">
+            <a:avLst/>
+          </a:prstGeom>
+        </p:spPr>
+        <p:txBody>
+          <a:bodyPr lIns="0" tIns="0" rIns="0" bIns="0" rtlCol="0" anchor="t">
+            <a:spAutoFit/>
+          </a:bodyPr>
+          <a:lstStyle/>
           <a:p>
             <a:pPr algn="ctr">
               <a:lnSpc>
@@ -4784,7 +4888,7 @@
               </a:spcBef>
             </a:pPr>
             <a:r>
-              <a:rPr lang="en-US" sz="2250" b="1">
+              <a:rPr lang="en-US" sz="2250" b="1" dirty="0">
                 <a:solidFill>
                   <a:srgbClr val="000000"/>
                 </a:solidFill>
@@ -4793,7 +4897,7 @@
                 <a:cs typeface="Inter Bold"/>
                 <a:sym typeface="Inter Bold"/>
               </a:rPr>
-              <a:t>✔ Facilities coordination</a:t>
+              <a:t>Business &amp; Program Operations</a:t>
             </a:r>
           </a:p>
           <a:p>
@@ -4805,95 +4909,7 @@
                 <a:spcPct val="0"/>
               </a:spcBef>
             </a:pPr>
-            <a:r>
-              <a:rPr lang="en-US" sz="2250" b="1">
-                <a:solidFill>
-                  <a:srgbClr val="000000"/>
-                </a:solidFill>
-                <a:latin typeface="Inter Bold"/>
-                <a:ea typeface="Inter Bold"/>
-                <a:cs typeface="Inter Bold"/>
-                <a:sym typeface="Inter Bold"/>
-              </a:rPr>
-              <a:t>✔ Conference rooms</a:t>
-            </a:r>
-          </a:p>
-          <a:p>
-            <a:pPr algn="ctr">
-              <a:lnSpc>
-                <a:spcPts val="3375"/>
-              </a:lnSpc>
-              <a:spcBef>
-                <a:spcPct val="0"/>
-              </a:spcBef>
-            </a:pPr>
-            <a:r>
-              <a:rPr lang="en-US" sz="2250" b="1">
-                <a:solidFill>
-                  <a:srgbClr val="000000"/>
-                </a:solidFill>
-                <a:latin typeface="Inter Bold"/>
-                <a:ea typeface="Inter Bold"/>
-                <a:cs typeface="Inter Bold"/>
-                <a:sym typeface="Inter Bold"/>
-              </a:rPr>
-              <a:t>✔ Vendor coordination</a:t>
-            </a:r>
-          </a:p>
-          <a:p>
-            <a:pPr algn="ctr">
-              <a:lnSpc>
-                <a:spcPts val="3375"/>
-              </a:lnSpc>
-              <a:spcBef>
-                <a:spcPct val="0"/>
-              </a:spcBef>
-            </a:pPr>
-            <a:r>
-              <a:rPr lang="en-US" sz="2250" b="1">
-                <a:solidFill>
-                  <a:srgbClr val="000000"/>
-                </a:solidFill>
-                <a:latin typeface="Inter Bold"/>
-                <a:ea typeface="Inter Bold"/>
-                <a:cs typeface="Inter Bold"/>
-                <a:sym typeface="Inter Bold"/>
-              </a:rPr>
-              <a:t>✔ Meeting logistics</a:t>
-            </a:r>
-          </a:p>
-          <a:p>
-            <a:pPr algn="ctr">
-              <a:lnSpc>
-                <a:spcPts val="3375"/>
-              </a:lnSpc>
-              <a:spcBef>
-                <a:spcPct val="0"/>
-              </a:spcBef>
-            </a:pPr>
-            <a:r>
-              <a:rPr lang="en-US" sz="2250" b="1">
-                <a:solidFill>
-                  <a:srgbClr val="000000"/>
-                </a:solidFill>
-                <a:latin typeface="Inter Bold"/>
-                <a:ea typeface="Inter Bold"/>
-                <a:cs typeface="Inter Bold"/>
-                <a:sym typeface="Inter Bold"/>
-              </a:rPr>
-              <a:t>✔ Process improvement</a:t>
-            </a:r>
-          </a:p>
-          <a:p>
-            <a:pPr algn="ctr">
-              <a:lnSpc>
-                <a:spcPts val="3375"/>
-              </a:lnSpc>
-              <a:spcBef>
-                <a:spcPct val="0"/>
-              </a:spcBef>
-            </a:pPr>
-            <a:endParaRPr lang="en-US" sz="2250" b="1">
+            <a:endParaRPr lang="en-US" sz="2250" b="1" dirty="0">
               <a:solidFill>
                 <a:srgbClr val="000000"/>
               </a:solidFill>
@@ -4903,28 +4919,6 @@
               <a:sym typeface="Inter Bold"/>
             </a:endParaRPr>
           </a:p>
-        </p:txBody>
-      </p:sp>
-      <p:sp>
-        <p:nvSpPr>
-          <p:cNvPr id="6" name="TextBox 6"/>
-          <p:cNvSpPr txBox="1"/>
-          <p:nvPr/>
-        </p:nvSpPr>
-        <p:spPr>
-          <a:xfrm>
-            <a:off x="11920592" y="3022306"/>
-            <a:ext cx="5338708" cy="4695825"/>
-          </a:xfrm>
-          <a:prstGeom prst="rect">
-            <a:avLst/>
-          </a:prstGeom>
-        </p:spPr>
-        <p:txBody>
-          <a:bodyPr lIns="0" tIns="0" rIns="0" bIns="0" rtlCol="0" anchor="t">
-            <a:spAutoFit/>
-          </a:bodyPr>
-          <a:lstStyle/>
           <a:p>
             <a:pPr algn="ctr">
               <a:lnSpc>
@@ -4935,28 +4929,66 @@
               </a:spcBef>
             </a:pPr>
             <a:r>
-              <a:rPr lang="en-US" sz="2250" b="1">
-                <a:solidFill>
-                  <a:srgbClr val="000000"/>
-                </a:solidFill>
-                <a:latin typeface="Inter Bold"/>
-                <a:ea typeface="Inter Bold"/>
-                <a:cs typeface="Inter Bold"/>
-                <a:sym typeface="Inter Bold"/>
-              </a:rPr>
-              <a:t>Technology</a:t>
-            </a:r>
-          </a:p>
-          <a:p>
-            <a:pPr algn="ctr">
-              <a:lnSpc>
-                <a:spcPts val="3375"/>
-              </a:lnSpc>
-              <a:spcBef>
-                <a:spcPct val="0"/>
-              </a:spcBef>
-            </a:pPr>
-            <a:endParaRPr lang="en-US" sz="2250" b="1">
+              <a:rPr lang="en-US" sz="2400" dirty="0"/>
+              <a:t>Budget Stewardship</a:t>
+            </a:r>
+            <a:br>
+              <a:rPr lang="en-US" sz="2400" dirty="0"/>
+            </a:br>
+            <a:r>
+              <a:rPr lang="en-US" sz="2400" dirty="0"/>
+              <a:t>Process Improvement</a:t>
+            </a:r>
+            <a:br>
+              <a:rPr lang="en-US" sz="2400" dirty="0"/>
+            </a:br>
+            <a:r>
+              <a:rPr lang="en-US" sz="2400" dirty="0"/>
+              <a:t>SOP Development</a:t>
+            </a:r>
+            <a:br>
+              <a:rPr lang="en-US" sz="2400" dirty="0"/>
+            </a:br>
+            <a:r>
+              <a:rPr lang="en-US" sz="2400" dirty="0"/>
+              <a:t>Workload Planning</a:t>
+            </a:r>
+            <a:br>
+              <a:rPr lang="en-US" sz="2400" dirty="0"/>
+            </a:br>
+            <a:r>
+              <a:rPr lang="en-US" sz="2400" dirty="0"/>
+              <a:t>Cross-Functional Coordination</a:t>
+            </a:r>
+            <a:br>
+              <a:rPr lang="en-US" sz="2400" dirty="0"/>
+            </a:br>
+            <a:r>
+              <a:rPr lang="en-US" sz="2400" dirty="0"/>
+              <a:t>Compliance</a:t>
+            </a:r>
+            <a:br>
+              <a:rPr lang="en-US" sz="2400" dirty="0"/>
+            </a:br>
+            <a:r>
+              <a:rPr lang="en-US" sz="2400" dirty="0"/>
+              <a:t>Project Execution</a:t>
+            </a:r>
+            <a:br>
+              <a:rPr lang="en-US" sz="2400" dirty="0"/>
+            </a:br>
+            <a:r>
+              <a:rPr lang="en-US" sz="2400" dirty="0"/>
+              <a:t>Onboarding</a:t>
+            </a:r>
+            <a:br>
+              <a:rPr lang="en-US" sz="2400" dirty="0"/>
+            </a:br>
+            <a:r>
+              <a:rPr lang="en-US" sz="2400" dirty="0"/>
+              <a:t>Event Coordination</a:t>
+            </a:r>
+            <a:endParaRPr lang="en-US" sz="2250" b="1" dirty="0">
               <a:solidFill>
                 <a:srgbClr val="000000"/>
               </a:solidFill>
@@ -4975,8 +5007,49 @@
                 <a:spcPct val="0"/>
               </a:spcBef>
             </a:pPr>
-            <a:r>
-              <a:rPr lang="en-US" sz="2250" b="1">
+            <a:endParaRPr lang="en-US" sz="2250" b="1" dirty="0">
+              <a:solidFill>
+                <a:srgbClr val="000000"/>
+              </a:solidFill>
+              <a:latin typeface="Inter Bold"/>
+              <a:ea typeface="Inter Bold"/>
+              <a:cs typeface="Inter Bold"/>
+              <a:sym typeface="Inter Bold"/>
+            </a:endParaRPr>
+          </a:p>
+        </p:txBody>
+      </p:sp>
+      <p:sp>
+        <p:nvSpPr>
+          <p:cNvPr id="7" name="TextBox 7"/>
+          <p:cNvSpPr txBox="1"/>
+          <p:nvPr/>
+        </p:nvSpPr>
+        <p:spPr>
+          <a:xfrm>
+            <a:off x="11965138" y="3493870"/>
+            <a:ext cx="5338708" cy="5182894"/>
+          </a:xfrm>
+          <a:prstGeom prst="rect">
+            <a:avLst/>
+          </a:prstGeom>
+        </p:spPr>
+        <p:txBody>
+          <a:bodyPr lIns="0" tIns="0" rIns="0" bIns="0" rtlCol="0" anchor="t">
+            <a:spAutoFit/>
+          </a:bodyPr>
+          <a:lstStyle/>
+          <a:p>
+            <a:pPr algn="ctr">
+              <a:lnSpc>
+                <a:spcPts val="3375"/>
+              </a:lnSpc>
+              <a:spcBef>
+                <a:spcPct val="0"/>
+              </a:spcBef>
+            </a:pPr>
+            <a:r>
+              <a:rPr lang="en-US" sz="2250" b="1" dirty="0">
                 <a:solidFill>
                   <a:srgbClr val="000000"/>
                 </a:solidFill>
@@ -4985,7 +5058,7 @@
                 <a:cs typeface="Inter Bold"/>
                 <a:sym typeface="Inter Bold"/>
               </a:rPr>
-              <a:t>✔ Microsoft Office</a:t>
+              <a:t>Systems &amp; Technology</a:t>
             </a:r>
           </a:p>
           <a:p>
@@ -4997,8 +5070,27 @@
                 <a:spcPct val="0"/>
               </a:spcBef>
             </a:pPr>
-            <a:r>
-              <a:rPr lang="en-US" sz="2250" b="1">
+            <a:endParaRPr lang="en-US" sz="2250" b="1" dirty="0">
+              <a:solidFill>
+                <a:srgbClr val="000000"/>
+              </a:solidFill>
+              <a:latin typeface="Inter Bold"/>
+              <a:ea typeface="Inter Bold"/>
+              <a:cs typeface="Inter Bold"/>
+              <a:sym typeface="Inter Bold"/>
+            </a:endParaRPr>
+          </a:p>
+          <a:p>
+            <a:pPr algn="ctr">
+              <a:lnSpc>
+                <a:spcPts val="3375"/>
+              </a:lnSpc>
+              <a:spcBef>
+                <a:spcPct val="0"/>
+              </a:spcBef>
+            </a:pPr>
+            <a:r>
+              <a:rPr lang="en-US" sz="2250" b="1" dirty="0">
                 <a:solidFill>
                   <a:srgbClr val="000000"/>
                 </a:solidFill>
@@ -5007,151 +5099,76 @@
                 <a:cs typeface="Inter Bold"/>
                 <a:sym typeface="Inter Bold"/>
               </a:rPr>
-              <a:t>✔ Teams</a:t>
-            </a:r>
-          </a:p>
-          <a:p>
-            <a:pPr algn="ctr">
-              <a:lnSpc>
-                <a:spcPts val="3375"/>
-              </a:lnSpc>
-              <a:spcBef>
-                <a:spcPct val="0"/>
-              </a:spcBef>
-            </a:pPr>
-            <a:r>
-              <a:rPr lang="en-US" sz="2250" b="1">
-                <a:solidFill>
-                  <a:srgbClr val="000000"/>
-                </a:solidFill>
-                <a:latin typeface="Inter Bold"/>
-                <a:ea typeface="Inter Bold"/>
-                <a:cs typeface="Inter Bold"/>
-                <a:sym typeface="Inter Bold"/>
-              </a:rPr>
-              <a:t>✔ SharePoint</a:t>
-            </a:r>
-          </a:p>
-          <a:p>
-            <a:pPr algn="ctr">
-              <a:lnSpc>
-                <a:spcPts val="3375"/>
-              </a:lnSpc>
-              <a:spcBef>
-                <a:spcPct val="0"/>
-              </a:spcBef>
-            </a:pPr>
-            <a:r>
-              <a:rPr lang="en-US" sz="2250" b="1">
-                <a:solidFill>
-                  <a:srgbClr val="000000"/>
-                </a:solidFill>
-                <a:latin typeface="Inter Bold"/>
-                <a:ea typeface="Inter Bold"/>
-                <a:cs typeface="Inter Bold"/>
-                <a:sym typeface="Inter Bold"/>
-              </a:rPr>
-              <a:t>✔ Workday</a:t>
-            </a:r>
-          </a:p>
-          <a:p>
-            <a:pPr algn="ctr">
-              <a:lnSpc>
-                <a:spcPts val="3375"/>
-              </a:lnSpc>
-              <a:spcBef>
-                <a:spcPct val="0"/>
-              </a:spcBef>
-            </a:pPr>
-            <a:r>
-              <a:rPr lang="en-US" sz="2250" b="1">
-                <a:solidFill>
-                  <a:srgbClr val="000000"/>
-                </a:solidFill>
-                <a:latin typeface="Inter Bold"/>
-                <a:ea typeface="Inter Bold"/>
-                <a:cs typeface="Inter Bold"/>
-                <a:sym typeface="Inter Bold"/>
-              </a:rPr>
-              <a:t>✔ SAP</a:t>
-            </a:r>
-          </a:p>
-          <a:p>
-            <a:pPr algn="ctr">
-              <a:lnSpc>
-                <a:spcPts val="3375"/>
-              </a:lnSpc>
-              <a:spcBef>
-                <a:spcPct val="0"/>
-              </a:spcBef>
-            </a:pPr>
-            <a:r>
-              <a:rPr lang="en-US" sz="2250" b="1">
-                <a:solidFill>
-                  <a:srgbClr val="000000"/>
-                </a:solidFill>
-                <a:latin typeface="Inter Bold"/>
-                <a:ea typeface="Inter Bold"/>
-                <a:cs typeface="Inter Bold"/>
-                <a:sym typeface="Inter Bold"/>
-              </a:rPr>
-              <a:t>✔ Microsoft Copilot</a:t>
-            </a:r>
-          </a:p>
-          <a:p>
-            <a:pPr algn="ctr">
-              <a:lnSpc>
-                <a:spcPts val="3375"/>
-              </a:lnSpc>
-              <a:spcBef>
-                <a:spcPct val="0"/>
-              </a:spcBef>
-            </a:pPr>
-            <a:r>
-              <a:rPr lang="en-US" sz="2250" b="1">
-                <a:solidFill>
-                  <a:srgbClr val="000000"/>
-                </a:solidFill>
-                <a:latin typeface="Inter Bold"/>
-                <a:ea typeface="Inter Bold"/>
-                <a:cs typeface="Inter Bold"/>
-                <a:sym typeface="Inter Bold"/>
-              </a:rPr>
-              <a:t>✔ ChatGPT</a:t>
-            </a:r>
-          </a:p>
-          <a:p>
-            <a:pPr algn="ctr">
-              <a:lnSpc>
-                <a:spcPts val="3375"/>
-              </a:lnSpc>
-              <a:spcBef>
-                <a:spcPct val="0"/>
-              </a:spcBef>
-            </a:pPr>
-            <a:r>
-              <a:rPr lang="en-US" sz="2250" b="1">
-                <a:solidFill>
-                  <a:srgbClr val="000000"/>
-                </a:solidFill>
-                <a:latin typeface="Inter Bold"/>
-                <a:ea typeface="Inter Bold"/>
-                <a:cs typeface="Inter Bold"/>
-                <a:sym typeface="Inter Bold"/>
-              </a:rPr>
-              <a:t>✔Adaptability to learn new technology</a:t>
-            </a:r>
-          </a:p>
-          <a:p>
-            <a:pPr algn="ctr">
-              <a:lnSpc>
-                <a:spcPts val="3375"/>
-              </a:lnSpc>
-              <a:spcBef>
-                <a:spcPct val="0"/>
-              </a:spcBef>
-            </a:pPr>
-            <a:endParaRPr lang="en-US" sz="2250" b="1">
+              <a:t> </a:t>
+            </a:r>
+            <a:r>
+              <a:rPr lang="en-US" sz="2400" dirty="0"/>
+              <a:t>Microsoft 365</a:t>
+            </a:r>
+            <a:br>
+              <a:rPr lang="en-US" sz="2400" dirty="0"/>
+            </a:br>
+            <a:r>
+              <a:rPr lang="en-US" sz="2400" dirty="0"/>
+              <a:t>Excel</a:t>
+            </a:r>
+            <a:br>
+              <a:rPr lang="en-US" sz="2400" dirty="0"/>
+            </a:br>
+            <a:r>
+              <a:rPr lang="en-US" sz="2400" dirty="0"/>
+              <a:t>Power BI</a:t>
+            </a:r>
+            <a:br>
+              <a:rPr lang="en-US" sz="2400" dirty="0"/>
+            </a:br>
+            <a:r>
+              <a:rPr lang="en-US" sz="2400" dirty="0"/>
+              <a:t>Teams / SharePoint</a:t>
+            </a:r>
+            <a:br>
+              <a:rPr lang="en-US" sz="2400" dirty="0"/>
+            </a:br>
+            <a:r>
+              <a:rPr lang="en-US" sz="2400" dirty="0"/>
+              <a:t>Workday</a:t>
+            </a:r>
+            <a:br>
+              <a:rPr lang="en-US" sz="2400" dirty="0"/>
+            </a:br>
+            <a:r>
+              <a:rPr lang="en-US" sz="2400" dirty="0"/>
+              <a:t>SAP</a:t>
+            </a:r>
+            <a:br>
+              <a:rPr lang="en-US" sz="2400" dirty="0"/>
+            </a:br>
+            <a:r>
+              <a:rPr lang="en-US" sz="2400" dirty="0"/>
+              <a:t>Oracle / PeopleSoft</a:t>
+            </a:r>
+            <a:br>
+              <a:rPr lang="en-US" sz="2400" dirty="0"/>
+            </a:br>
+            <a:r>
+              <a:rPr lang="en-US" sz="2400" dirty="0"/>
+              <a:t>Microsoft Copilot</a:t>
+            </a:r>
+            <a:br>
+              <a:rPr lang="en-US" sz="2400" dirty="0"/>
+            </a:br>
+            <a:r>
+              <a:rPr lang="en-US" sz="2400" dirty="0"/>
+              <a:t>ChatGPT</a:t>
+            </a:r>
+            <a:br>
+              <a:rPr lang="en-US" sz="2400" dirty="0"/>
+            </a:br>
+            <a:r>
+              <a:rPr lang="en-US" sz="2400" dirty="0"/>
+              <a:t>Technology Adaptability</a:t>
+            </a:r>
+            <a:endParaRPr lang="en-US" sz="2250" b="1" dirty="0">
               <a:solidFill>
                 <a:srgbClr val="000000"/>
               </a:solidFill>
@@ -5376,8 +5393,8 @@
         </p:nvSpPr>
         <p:spPr>
           <a:xfrm>
-            <a:off x="4149090" y="3146993"/>
-            <a:ext cx="9190992" cy="3888239"/>
+            <a:off x="3912649" y="3146993"/>
+            <a:ext cx="9663874" cy="5941306"/>
           </a:xfrm>
           <a:prstGeom prst="rect">
             <a:avLst/>
@@ -5398,7 +5415,7 @@
               </a:spcBef>
             </a:pPr>
             <a:r>
-              <a:rPr lang="en-US" sz="3468" b="1">
+              <a:rPr lang="en-US" sz="3468" b="1" dirty="0">
                 <a:solidFill>
                   <a:srgbClr val="000000"/>
                 </a:solidFill>
@@ -5407,7 +5424,11 @@
                 <a:cs typeface="Inter Bold"/>
                 <a:sym typeface="Inter Bold"/>
               </a:rPr>
-              <a:t>📈 Improved operational efficiency by 30%</a:t>
+              <a:t>📈 </a:t>
+            </a:r>
+            <a:r>
+              <a:rPr lang="en-US" sz="3600" b="1" dirty="0"/>
+              <a:t>Reduced processing time and rework through workflow standardization and clearer SOPs</a:t>
             </a:r>
           </a:p>
           <a:p>
@@ -5420,7 +5441,7 @@
               </a:spcBef>
             </a:pPr>
             <a:r>
-              <a:rPr lang="en-US" sz="3468" b="1">
+              <a:rPr lang="en-US" sz="3468" b="1" dirty="0">
                 <a:solidFill>
                   <a:srgbClr val="000000"/>
                 </a:solidFill>
@@ -5429,8 +5450,21 @@
                 <a:cs typeface="Inter Bold"/>
                 <a:sym typeface="Inter Bold"/>
               </a:rPr>
-              <a:t>💰 Managed $750K annual budget</a:t>
-            </a:r>
+              <a:t>💰 </a:t>
+            </a:r>
+            <a:r>
+              <a:rPr lang="en-US" sz="3600" b="1" dirty="0"/>
+              <a:t>$750K Annual Budget Stewardship</a:t>
+            </a:r>
+            <a:endParaRPr lang="en-US" sz="3468" b="1" dirty="0">
+              <a:solidFill>
+                <a:srgbClr val="000000"/>
+              </a:solidFill>
+              <a:latin typeface="Inter Bold"/>
+              <a:ea typeface="Inter Bold"/>
+              <a:cs typeface="Inter Bold"/>
+              <a:sym typeface="Inter Bold"/>
+            </a:endParaRPr>
           </a:p>
           <a:p>
             <a:pPr algn="ctr">
@@ -5442,7 +5476,7 @@
               </a:spcBef>
             </a:pPr>
             <a:r>
-              <a:rPr lang="en-US" sz="3468" b="1">
+              <a:rPr lang="en-US" sz="3468" b="1" dirty="0">
                 <a:solidFill>
                   <a:srgbClr val="000000"/>
                 </a:solidFill>
@@ -5451,8 +5485,21 @@
                 <a:cs typeface="Inter Bold"/>
                 <a:sym typeface="Inter Bold"/>
               </a:rPr>
-              <a:t>👥 Led teams of 14</a:t>
-            </a:r>
+              <a:t>👥 </a:t>
+            </a:r>
+            <a:r>
+              <a:rPr lang="en-US" sz="3600" b="1" dirty="0"/>
+              <a:t>14 Team Members Led</a:t>
+            </a:r>
+            <a:endParaRPr lang="en-US" sz="3468" b="1" dirty="0">
+              <a:solidFill>
+                <a:srgbClr val="000000"/>
+              </a:solidFill>
+              <a:latin typeface="Inter Bold"/>
+              <a:ea typeface="Inter Bold"/>
+              <a:cs typeface="Inter Bold"/>
+              <a:sym typeface="Inter Bold"/>
+            </a:endParaRPr>
           </a:p>
           <a:p>
             <a:pPr algn="ctr">
@@ -5464,7 +5511,7 @@
               </a:spcBef>
             </a:pPr>
             <a:r>
-              <a:rPr lang="en-US" sz="3468" b="1">
+              <a:rPr lang="en-US" sz="3468" b="1" dirty="0">
                 <a:solidFill>
                   <a:srgbClr val="000000"/>
                 </a:solidFill>
@@ -5473,8 +5520,21 @@
                 <a:cs typeface="Inter Bold"/>
                 <a:sym typeface="Inter Bold"/>
               </a:rPr>
-              <a:t>📊 Executive KPI reporting</a:t>
-            </a:r>
+              <a:t>📊 </a:t>
+            </a:r>
+            <a:r>
+              <a:rPr lang="en-US" sz="3600" b="1" dirty="0"/>
+              <a:t>Executive KPI &amp; Operational Reporting</a:t>
+            </a:r>
+            <a:endParaRPr lang="en-US" sz="3468" b="1" dirty="0">
+              <a:solidFill>
+                <a:srgbClr val="000000"/>
+              </a:solidFill>
+              <a:latin typeface="Inter Bold"/>
+              <a:ea typeface="Inter Bold"/>
+              <a:cs typeface="Inter Bold"/>
+              <a:sym typeface="Inter Bold"/>
+            </a:endParaRPr>
           </a:p>
           <a:p>
             <a:pPr algn="ctr">
@@ -5486,7 +5546,7 @@
               </a:spcBef>
             </a:pPr>
             <a:r>
-              <a:rPr lang="en-US" sz="3468" b="1">
+              <a:rPr lang="en-US" sz="3468" b="1" dirty="0">
                 <a:solidFill>
                   <a:srgbClr val="000000"/>
                 </a:solidFill>
@@ -5508,7 +5568,7 @@
               </a:spcBef>
             </a:pPr>
             <a:r>
-              <a:rPr lang="en-US" sz="3468" b="1">
+              <a:rPr lang="en-US" sz="3468" b="1" dirty="0">
                 <a:solidFill>
                   <a:srgbClr val="000000"/>
                 </a:solidFill>
@@ -5518,6 +5578,50 @@
                 <a:sym typeface="Inter Bold"/>
               </a:rPr>
               <a:t>⚙️ Process improvements</a:t>
+            </a:r>
+          </a:p>
+          <a:p>
+            <a:pPr algn="ctr">
+              <a:lnSpc>
+                <a:spcPts val="5202"/>
+              </a:lnSpc>
+              <a:spcBef>
+                <a:spcPct val="0"/>
+              </a:spcBef>
+            </a:pPr>
+            <a:r>
+              <a:rPr lang="en-US" sz="3468" b="1" dirty="0">
+                <a:solidFill>
+                  <a:srgbClr val="000000"/>
+                </a:solidFill>
+                <a:latin typeface="Inter Bold"/>
+                <a:ea typeface="Inter Bold"/>
+                <a:cs typeface="Inter Bold"/>
+                <a:sym typeface="Inter Bold"/>
+              </a:rPr>
+              <a:t>Supported several executive leaders at a time</a:t>
+            </a:r>
+          </a:p>
+          <a:p>
+            <a:pPr algn="ctr">
+              <a:lnSpc>
+                <a:spcPts val="5202"/>
+              </a:lnSpc>
+              <a:spcBef>
+                <a:spcPct val="0"/>
+              </a:spcBef>
+            </a:pPr>
+            <a:r>
+              <a:rPr lang="en-US" sz="3468" b="1" dirty="0">
+                <a:solidFill>
+                  <a:srgbClr val="000000"/>
+                </a:solidFill>
+                <a:latin typeface="Inter Bold"/>
+                <a:ea typeface="Inter Bold"/>
+                <a:cs typeface="Inter Bold"/>
+                <a:sym typeface="Inter Bold"/>
+              </a:rPr>
+              <a:t>to continue busy operations.</a:t>
             </a:r>
           </a:p>
         </p:txBody>
@@ -6312,8 +6416,8 @@
         </p:nvSpPr>
         <p:spPr>
           <a:xfrm>
-            <a:off x="3460717" y="5822883"/>
-            <a:ext cx="3721596" cy="2981325"/>
+            <a:off x="2971800" y="6650279"/>
+            <a:ext cx="3721596" cy="2150653"/>
           </a:xfrm>
           <a:prstGeom prst="rect">
             <a:avLst/>
@@ -6334,16 +6438,8 @@
               </a:spcBef>
             </a:pPr>
             <a:r>
-              <a:rPr lang="en-US" sz="2250" b="1">
-                <a:solidFill>
-                  <a:srgbClr val="1C1917"/>
-                </a:solidFill>
-                <a:latin typeface="Inter Bold"/>
-                <a:ea typeface="Inter Bold"/>
-                <a:cs typeface="Inter Bold"/>
-                <a:sym typeface="Inter Bold"/>
-              </a:rPr>
-              <a:t>AI</a:t>
+              <a:rPr lang="en-US" sz="2400" b="1" dirty="0"/>
+              <a:t>AI-Assisted Research Knowledge Synthesis </a:t>
             </a:r>
           </a:p>
           <a:p>
@@ -6356,127 +6452,18 @@
               </a:spcBef>
             </a:pPr>
             <a:r>
-              <a:rPr lang="en-US" sz="2250" b="1">
-                <a:solidFill>
-                  <a:srgbClr val="1C1917"/>
-                </a:solidFill>
-                <a:latin typeface="Inter Bold"/>
-                <a:ea typeface="Inter Bold"/>
-                <a:cs typeface="Inter Bold"/>
-                <a:sym typeface="Inter Bold"/>
-              </a:rPr>
-              <a:t>Microsoft Copilot</a:t>
-            </a:r>
-          </a:p>
-          <a:p>
-            <a:pPr algn="ctr">
-              <a:lnSpc>
-                <a:spcPts val="3375"/>
-              </a:lnSpc>
-              <a:spcBef>
-                <a:spcPct val="0"/>
-              </a:spcBef>
-            </a:pPr>
-            <a:r>
-              <a:rPr lang="en-US" sz="2250" b="1">
-                <a:solidFill>
-                  <a:srgbClr val="1C1917"/>
-                </a:solidFill>
-                <a:latin typeface="Inter Bold"/>
-                <a:ea typeface="Inter Bold"/>
-                <a:cs typeface="Inter Bold"/>
-                <a:sym typeface="Inter Bold"/>
-              </a:rPr>
-              <a:t>ChatGPT</a:t>
-            </a:r>
-          </a:p>
-          <a:p>
-            <a:pPr algn="ctr">
-              <a:lnSpc>
-                <a:spcPts val="3375"/>
-              </a:lnSpc>
-              <a:spcBef>
-                <a:spcPct val="0"/>
-              </a:spcBef>
-            </a:pPr>
-            <a:r>
-              <a:rPr lang="en-US" sz="2250" b="1">
-                <a:solidFill>
-                  <a:srgbClr val="1C1917"/>
-                </a:solidFill>
-                <a:latin typeface="Inter Bold"/>
-                <a:ea typeface="Inter Bold"/>
-                <a:cs typeface="Inter Bold"/>
-                <a:sym typeface="Inter Bold"/>
-              </a:rPr>
-              <a:t>AI-assisted research</a:t>
-            </a:r>
-          </a:p>
-          <a:p>
-            <a:pPr algn="ctr">
-              <a:lnSpc>
-                <a:spcPts val="3375"/>
-              </a:lnSpc>
-              <a:spcBef>
-                <a:spcPct val="0"/>
-              </a:spcBef>
-            </a:pPr>
-            <a:r>
-              <a:rPr lang="en-US" sz="2250" b="1">
-                <a:solidFill>
-                  <a:srgbClr val="1C1917"/>
-                </a:solidFill>
-                <a:latin typeface="Inter Bold"/>
-                <a:ea typeface="Inter Bold"/>
-                <a:cs typeface="Inter Bold"/>
-                <a:sym typeface="Inter Bold"/>
-              </a:rPr>
-              <a:t>Workflow automation</a:t>
-            </a:r>
-          </a:p>
-          <a:p>
-            <a:pPr algn="ctr">
-              <a:lnSpc>
-                <a:spcPts val="3375"/>
-              </a:lnSpc>
-              <a:spcBef>
-                <a:spcPct val="0"/>
-              </a:spcBef>
-            </a:pPr>
-            <a:r>
-              <a:rPr lang="en-US" sz="2250" b="1">
-                <a:solidFill>
-                  <a:srgbClr val="1C1917"/>
-                </a:solidFill>
-                <a:latin typeface="Inter Bold"/>
-                <a:ea typeface="Inter Bold"/>
-                <a:cs typeface="Inter Bold"/>
-                <a:sym typeface="Inter Bold"/>
-              </a:rPr>
-              <a:t>Executive communications</a:t>
-            </a:r>
-          </a:p>
-          <a:p>
-            <a:pPr algn="ctr">
-              <a:lnSpc>
-                <a:spcPts val="3375"/>
-              </a:lnSpc>
-              <a:spcBef>
-                <a:spcPct val="0"/>
-              </a:spcBef>
-            </a:pPr>
-            <a:r>
-              <a:rPr lang="en-US" sz="2250" b="1">
-                <a:solidFill>
-                  <a:srgbClr val="1C1917"/>
-                </a:solidFill>
-                <a:latin typeface="Inter Bold"/>
-                <a:ea typeface="Inter Bold"/>
-                <a:cs typeface="Inter Bold"/>
-                <a:sym typeface="Inter Bold"/>
-              </a:rPr>
-              <a:t>Knowledge synthesis</a:t>
-            </a:r>
+              <a:rPr lang="en-US" sz="2400" b="1" dirty="0"/>
+              <a:t>Process Documentation Executive Communications Workflow Optimization</a:t>
+            </a:r>
+            <a:endParaRPr lang="en-US" sz="2250" b="1" dirty="0">
+              <a:solidFill>
+                <a:srgbClr val="1C1917"/>
+              </a:solidFill>
+              <a:latin typeface="Inter Bold"/>
+              <a:ea typeface="Inter Bold"/>
+              <a:cs typeface="Inter Bold"/>
+              <a:sym typeface="Inter Bold"/>
+            </a:endParaRPr>
           </a:p>
         </p:txBody>
       </p:sp>
@@ -6631,7 +6618,7 @@
         <p:spPr>
           <a:xfrm>
             <a:off x="1028700" y="1177246"/>
-            <a:ext cx="9799439" cy="600075"/>
+            <a:ext cx="9799439" cy="628377"/>
           </a:xfrm>
           <a:prstGeom prst="rect">
             <a:avLst/>
@@ -6643,23 +6630,26 @@
           </a:bodyPr>
           <a:lstStyle/>
           <a:p>
-            <a:pPr algn="l">
+            <a:pPr>
               <a:lnSpc>
                 <a:spcPts val="4860"/>
               </a:lnSpc>
             </a:pPr>
             <a:r>
-              <a:rPr lang="en-US" sz="4050" b="1">
-                <a:solidFill>
-                  <a:srgbClr val="1C1917"/>
-                </a:solidFill>
-                <a:latin typeface="Montserrat Bold"/>
-                <a:ea typeface="Montserrat Bold"/>
-                <a:cs typeface="Montserrat Bold"/>
-                <a:sym typeface="Montserrat Bold"/>
-              </a:rPr>
-              <a:t>How I Support Executive Operations</a:t>
-            </a:r>
+              <a:rPr lang="en-US" sz="4400" dirty="0">
+                <a:latin typeface="Canva Sans Bold" panose="020B0604020202020204" charset="0"/>
+              </a:rPr>
+              <a:t>HOW I OPERATE</a:t>
+            </a:r>
+            <a:endParaRPr lang="en-US" sz="4050" b="1" dirty="0">
+              <a:solidFill>
+                <a:srgbClr val="1C1917"/>
+              </a:solidFill>
+              <a:latin typeface="Canva Sans Bold" panose="020B0604020202020204" charset="0"/>
+              <a:ea typeface="Montserrat Bold"/>
+              <a:cs typeface="Montserrat Bold"/>
+              <a:sym typeface="Montserrat Bold"/>
+            </a:endParaRPr>
           </a:p>
         </p:txBody>
       </p:sp>
@@ -6671,8 +6661,8 @@
         </p:nvSpPr>
         <p:spPr>
           <a:xfrm>
-            <a:off x="9528932" y="2484102"/>
-            <a:ext cx="7956543" cy="6294125"/>
+            <a:off x="8172450" y="2874046"/>
+            <a:ext cx="9997488" cy="5965672"/>
           </a:xfrm>
           <a:prstGeom prst="rect">
             <a:avLst/>
@@ -6686,14 +6676,14 @@
           <a:p>
             <a:pPr algn="ctr">
               <a:lnSpc>
-                <a:spcPts val="5608"/>
+                <a:spcPts val="3600"/>
               </a:lnSpc>
               <a:spcBef>
                 <a:spcPct val="0"/>
               </a:spcBef>
             </a:pPr>
             <a:r>
-              <a:rPr lang="en-US" sz="3739" b="1">
+              <a:rPr lang="en-US" sz="2400" b="1" dirty="0">
                 <a:solidFill>
                   <a:srgbClr val="000000"/>
                 </a:solidFill>
@@ -6702,184 +6692,317 @@
                 <a:cs typeface="Inter Bold"/>
                 <a:sym typeface="Inter Bold"/>
               </a:rPr>
-              <a:t>🏢 Conference Room Coordination</a:t>
-            </a:r>
+              <a:t>🏢 </a:t>
+            </a:r>
+            <a:r>
+              <a:rPr lang="en-US" sz="2400" b="1" dirty="0">
+                <a:latin typeface="Canva Sans Bold" panose="020B0604020202020204" charset="0"/>
+              </a:rPr>
+              <a:t>Executive &amp; Stakeholder Coordination</a:t>
+            </a:r>
+            <a:endParaRPr lang="en-US" sz="2400" b="1" dirty="0">
+              <a:solidFill>
+                <a:srgbClr val="000000"/>
+              </a:solidFill>
+              <a:latin typeface="Canva Sans Bold" panose="020B0604020202020204" charset="0"/>
+              <a:ea typeface="Inter Bold"/>
+              <a:cs typeface="Inter Bold"/>
+              <a:sym typeface="Inter Bold"/>
+            </a:endParaRPr>
           </a:p>
           <a:p>
             <a:pPr algn="ctr">
               <a:lnSpc>
-                <a:spcPts val="5608"/>
+                <a:spcPts val="3600"/>
               </a:lnSpc>
               <a:spcBef>
                 <a:spcPct val="0"/>
               </a:spcBef>
             </a:pPr>
             <a:r>
-              <a:rPr lang="en-US" sz="3739" b="1">
+              <a:rPr lang="en-US" sz="2400" b="1" dirty="0">
                 <a:solidFill>
                   <a:srgbClr val="000000"/>
                 </a:solidFill>
-                <a:latin typeface="Inter Bold"/>
+                <a:latin typeface="Canva Sans Bold" panose="020B0604020202020204" charset="0"/>
                 <a:ea typeface="Inter Bold"/>
                 <a:cs typeface="Inter Bold"/>
                 <a:sym typeface="Inter Bold"/>
               </a:rPr>
-              <a:t>👥 Executive Visitors</a:t>
-            </a:r>
+              <a:t>👥 </a:t>
+            </a:r>
+            <a:r>
+              <a:rPr lang="en-US" sz="2400" b="1" dirty="0">
+                <a:latin typeface="Canva Sans Bold" panose="020B0604020202020204" charset="0"/>
+              </a:rPr>
+              <a:t>Process Improvement</a:t>
+            </a:r>
+            <a:endParaRPr lang="en-US" sz="2400" b="1" dirty="0">
+              <a:solidFill>
+                <a:srgbClr val="000000"/>
+              </a:solidFill>
+              <a:latin typeface="Canva Sans Bold" panose="020B0604020202020204" charset="0"/>
+              <a:ea typeface="Inter Bold"/>
+              <a:cs typeface="Inter Bold"/>
+              <a:sym typeface="Inter Bold"/>
+            </a:endParaRPr>
           </a:p>
           <a:p>
             <a:pPr algn="ctr">
               <a:lnSpc>
-                <a:spcPts val="5608"/>
+                <a:spcPts val="3600"/>
               </a:lnSpc>
               <a:spcBef>
                 <a:spcPct val="0"/>
               </a:spcBef>
             </a:pPr>
             <a:r>
-              <a:rPr lang="en-US" sz="3739" b="1">
+              <a:rPr lang="en-US" sz="2400" b="1" dirty="0">
                 <a:solidFill>
                   <a:srgbClr val="000000"/>
                 </a:solidFill>
-                <a:latin typeface="Inter Bold"/>
+                <a:latin typeface="Canva Sans Bold" panose="020B0604020202020204" charset="0"/>
                 <a:ea typeface="Inter Bold"/>
                 <a:cs typeface="Inter Bold"/>
                 <a:sym typeface="Inter Bold"/>
               </a:rPr>
-              <a:t>🔐 Confidential Information</a:t>
-            </a:r>
+              <a:t>🔐 </a:t>
+            </a:r>
+            <a:r>
+              <a:rPr lang="en-US" sz="2400" b="1" dirty="0">
+                <a:latin typeface="Canva Sans Bold" panose="020B0604020202020204" charset="0"/>
+              </a:rPr>
+              <a:t>Scheduling &amp; Capacity Planning</a:t>
+            </a:r>
+            <a:endParaRPr lang="en-US" sz="2400" b="1" dirty="0">
+              <a:solidFill>
+                <a:srgbClr val="000000"/>
+              </a:solidFill>
+              <a:latin typeface="Canva Sans Bold" panose="020B0604020202020204" charset="0"/>
+              <a:ea typeface="Inter Bold"/>
+              <a:cs typeface="Inter Bold"/>
+              <a:sym typeface="Inter Bold"/>
+            </a:endParaRPr>
           </a:p>
           <a:p>
             <a:pPr algn="ctr">
               <a:lnSpc>
-                <a:spcPts val="5608"/>
+                <a:spcPts val="3600"/>
               </a:lnSpc>
               <a:spcBef>
                 <a:spcPct val="0"/>
               </a:spcBef>
             </a:pPr>
             <a:r>
-              <a:rPr lang="en-US" sz="3739" b="1">
+              <a:rPr lang="en-US" sz="2400" b="1" dirty="0">
                 <a:solidFill>
                   <a:srgbClr val="000000"/>
                 </a:solidFill>
-                <a:latin typeface="Inter Bold"/>
+                <a:latin typeface="Canva Sans Bold" panose="020B0604020202020204" charset="0"/>
                 <a:ea typeface="Inter Bold"/>
                 <a:cs typeface="Inter Bold"/>
                 <a:sym typeface="Inter Bold"/>
               </a:rPr>
-              <a:t>📦 Vendor Coordination</a:t>
-            </a:r>
+              <a:t>📦 </a:t>
+            </a:r>
+            <a:r>
+              <a:rPr lang="en-US" sz="2400" b="1" dirty="0">
+                <a:latin typeface="Canva Sans Bold" panose="020B0604020202020204" charset="0"/>
+              </a:rPr>
+              <a:t>SOP &amp; Workflow Development</a:t>
+            </a:r>
+            <a:endParaRPr lang="en-US" sz="2400" b="1" dirty="0">
+              <a:solidFill>
+                <a:srgbClr val="000000"/>
+              </a:solidFill>
+              <a:latin typeface="Canva Sans Bold" panose="020B0604020202020204" charset="0"/>
+              <a:ea typeface="Inter Bold"/>
+              <a:cs typeface="Inter Bold"/>
+              <a:sym typeface="Inter Bold"/>
+            </a:endParaRPr>
           </a:p>
           <a:p>
             <a:pPr algn="ctr">
               <a:lnSpc>
-                <a:spcPts val="5608"/>
+                <a:spcPts val="3600"/>
               </a:lnSpc>
               <a:spcBef>
                 <a:spcPct val="0"/>
               </a:spcBef>
             </a:pPr>
             <a:r>
-              <a:rPr lang="en-US" sz="3739" b="1">
+              <a:rPr lang="en-US" sz="2400" b="1" dirty="0">
                 <a:solidFill>
                   <a:srgbClr val="000000"/>
                 </a:solidFill>
-                <a:latin typeface="Inter Bold"/>
+                <a:latin typeface="Canva Sans Bold" panose="020B0604020202020204" charset="0"/>
                 <a:ea typeface="Inter Bold"/>
                 <a:cs typeface="Inter Bold"/>
                 <a:sym typeface="Inter Bold"/>
               </a:rPr>
-              <a:t>☕ Catering</a:t>
-            </a:r>
+              <a:t>📬 </a:t>
+            </a:r>
+            <a:r>
+              <a:rPr lang="en-US" sz="2400" b="1" dirty="0">
+                <a:latin typeface="Canva Sans Bold" panose="020B0604020202020204" charset="0"/>
+              </a:rPr>
+              <a:t>Financial &amp; Budget Administration</a:t>
+            </a:r>
+            <a:endParaRPr lang="en-US" sz="2400" b="1" dirty="0">
+              <a:solidFill>
+                <a:srgbClr val="000000"/>
+              </a:solidFill>
+              <a:latin typeface="Canva Sans Bold" panose="020B0604020202020204" charset="0"/>
+              <a:ea typeface="Inter Bold"/>
+              <a:cs typeface="Inter Bold"/>
+              <a:sym typeface="Inter Bold"/>
+            </a:endParaRPr>
           </a:p>
           <a:p>
             <a:pPr algn="ctr">
               <a:lnSpc>
-                <a:spcPts val="5608"/>
+                <a:spcPts val="3600"/>
               </a:lnSpc>
               <a:spcBef>
                 <a:spcPct val="0"/>
               </a:spcBef>
             </a:pPr>
             <a:r>
-              <a:rPr lang="en-US" sz="3739" b="1">
+              <a:rPr lang="en-US" sz="2400" b="1" dirty="0">
                 <a:solidFill>
                   <a:srgbClr val="000000"/>
                 </a:solidFill>
-                <a:latin typeface="Inter Bold"/>
+                <a:latin typeface="Canva Sans Bold" panose="020B0604020202020204" charset="0"/>
                 <a:ea typeface="Inter Bold"/>
                 <a:cs typeface="Inter Bold"/>
                 <a:sym typeface="Inter Bold"/>
               </a:rPr>
-              <a:t>📬 Mail</a:t>
-            </a:r>
+              <a:t>🖥 </a:t>
+            </a:r>
+            <a:r>
+              <a:rPr lang="en-US" sz="2400" b="1" dirty="0">
+                <a:latin typeface="Canva Sans Bold" panose="020B0604020202020204" charset="0"/>
+              </a:rPr>
+              <a:t>Cross-Functional Execution</a:t>
+            </a:r>
+            <a:endParaRPr lang="en-US" sz="2400" b="1" dirty="0">
+              <a:solidFill>
+                <a:srgbClr val="000000"/>
+              </a:solidFill>
+              <a:latin typeface="Canva Sans Bold" panose="020B0604020202020204" charset="0"/>
+              <a:ea typeface="Inter Bold"/>
+              <a:cs typeface="Inter Bold"/>
+              <a:sym typeface="Inter Bold"/>
+            </a:endParaRPr>
           </a:p>
           <a:p>
             <a:pPr algn="ctr">
               <a:lnSpc>
-                <a:spcPts val="5608"/>
+                <a:spcPts val="3600"/>
               </a:lnSpc>
               <a:spcBef>
                 <a:spcPct val="0"/>
               </a:spcBef>
             </a:pPr>
             <a:r>
-              <a:rPr lang="en-US" sz="3739" b="1">
+              <a:rPr lang="en-US" sz="2400" b="1" dirty="0">
                 <a:solidFill>
                   <a:srgbClr val="000000"/>
                 </a:solidFill>
-                <a:latin typeface="Inter Bold"/>
+                <a:latin typeface="Canva Sans Bold" panose="020B0604020202020204" charset="0"/>
                 <a:ea typeface="Inter Bold"/>
                 <a:cs typeface="Inter Bold"/>
                 <a:sym typeface="Inter Bold"/>
               </a:rPr>
-              <a:t>🖥 Meeting Technology</a:t>
-            </a:r>
+              <a:t>🚨 </a:t>
+            </a:r>
+            <a:r>
+              <a:rPr lang="en-US" sz="2400" b="1" dirty="0">
+                <a:latin typeface="Canva Sans Bold" panose="020B0604020202020204" charset="0"/>
+              </a:rPr>
+              <a:t>Risk &amp; Issue Resolution</a:t>
+            </a:r>
+            <a:endParaRPr lang="en-US" sz="2400" b="1" dirty="0">
+              <a:solidFill>
+                <a:srgbClr val="000000"/>
+              </a:solidFill>
+              <a:latin typeface="Canva Sans Bold" panose="020B0604020202020204" charset="0"/>
+              <a:ea typeface="Inter Bold"/>
+              <a:cs typeface="Inter Bold"/>
+              <a:sym typeface="Inter Bold"/>
+            </a:endParaRPr>
           </a:p>
           <a:p>
             <a:pPr algn="ctr">
               <a:lnSpc>
-                <a:spcPts val="5608"/>
+                <a:spcPts val="3600"/>
               </a:lnSpc>
               <a:spcBef>
                 <a:spcPct val="0"/>
               </a:spcBef>
             </a:pPr>
             <a:r>
-              <a:rPr lang="en-US" sz="3739" b="1">
+              <a:rPr lang="en-US" sz="2400" b="1" dirty="0">
                 <a:solidFill>
                   <a:srgbClr val="000000"/>
                 </a:solidFill>
-                <a:latin typeface="Inter Bold"/>
+                <a:latin typeface="Canva Sans Bold" panose="020B0604020202020204" charset="0"/>
                 <a:ea typeface="Inter Bold"/>
                 <a:cs typeface="Inter Bold"/>
                 <a:sym typeface="Inter Bold"/>
               </a:rPr>
-              <a:t>🚨 Emergency Readiness</a:t>
+              <a:t>📋 </a:t>
+            </a:r>
+            <a:r>
+              <a:rPr lang="en-US" sz="2400" b="1" dirty="0">
+                <a:latin typeface="Canva Sans Bold" panose="020B0604020202020204" charset="0"/>
+              </a:rPr>
+              <a:t>Technology Enablement</a:t>
             </a:r>
           </a:p>
           <a:p>
             <a:pPr algn="ctr">
               <a:lnSpc>
-                <a:spcPts val="5608"/>
+                <a:spcPts val="3600"/>
               </a:lnSpc>
               <a:spcBef>
                 <a:spcPct val="0"/>
               </a:spcBef>
             </a:pPr>
-            <a:r>
-              <a:rPr lang="en-US" sz="3739" b="1">
-                <a:solidFill>
-                  <a:srgbClr val="000000"/>
-                </a:solidFill>
-                <a:latin typeface="Inter Bold"/>
-                <a:ea typeface="Inter Bold"/>
-                <a:cs typeface="Inter Bold"/>
-                <a:sym typeface="Inter Bold"/>
-              </a:rPr>
-              <a:t>📋 Executive Events</a:t>
-            </a:r>
+            <a:endParaRPr lang="en-US" sz="2400" b="1" dirty="0">
+              <a:solidFill>
+                <a:srgbClr val="000000"/>
+              </a:solidFill>
+              <a:latin typeface="Canva Sans Bold" panose="020B0604020202020204" charset="0"/>
+              <a:ea typeface="Inter Bold"/>
+              <a:cs typeface="Inter Bold"/>
+              <a:sym typeface="Inter Bold"/>
+            </a:endParaRPr>
+          </a:p>
+          <a:p>
+            <a:pPr algn="ctr">
+              <a:lnSpc>
+                <a:spcPts val="3600"/>
+              </a:lnSpc>
+              <a:spcBef>
+                <a:spcPct val="0"/>
+              </a:spcBef>
+            </a:pPr>
+            <a:r>
+              <a:rPr lang="en-US" sz="2400" dirty="0">
+                <a:latin typeface="Canva Sans Bold" panose="020B0604020202020204" charset="0"/>
+              </a:rPr>
+              <a:t>I bring structure to complex, fast-moving environments by connecting people, processes, systems and priorities—creating clarity, strengthening execution and helping teams move work forward.</a:t>
+            </a:r>
+            <a:endParaRPr lang="en-US" sz="2400" b="1" dirty="0">
+              <a:solidFill>
+                <a:srgbClr val="000000"/>
+              </a:solidFill>
+              <a:latin typeface="Canva Sans Bold" panose="020B0604020202020204" charset="0"/>
+              <a:ea typeface="Inter Bold"/>
+              <a:cs typeface="Inter Bold"/>
+              <a:sym typeface="Inter Bold"/>
+            </a:endParaRPr>
           </a:p>
         </p:txBody>
       </p:sp>
@@ -7060,7 +7183,7 @@
         <p:spPr>
           <a:xfrm>
             <a:off x="836906" y="2733168"/>
-            <a:ext cx="16230600" cy="1266825"/>
+            <a:ext cx="16230600" cy="1278620"/>
           </a:xfrm>
           <a:prstGeom prst="rect">
             <a:avLst/>
@@ -7081,17 +7204,20 @@
               </a:spcBef>
             </a:pPr>
             <a:r>
-              <a:rPr lang="en-US" sz="2250" b="1">
-                <a:solidFill>
-                  <a:srgbClr val="000000"/>
-                </a:solidFill>
-                <a:latin typeface="Inter Bold"/>
-                <a:ea typeface="Inter Bold"/>
-                <a:cs typeface="Inter Bold"/>
-                <a:sym typeface="Inter Bold"/>
-              </a:rPr>
-              <a:t>I believe exceptional administrative professionals create the environment that allows executives and organizations to perform at their highest level. Through organization, professionalism, confidentiality, and proactive communication, I strive to build trust while anticipating needs before they become challenges.</a:t>
-            </a:r>
+              <a:rPr lang="en-US" sz="2400" dirty="0">
+                <a:latin typeface="Canva Sans Bold" panose="020B0604020202020204" charset="0"/>
+              </a:rPr>
+              <a:t>I believe strong operational leaders create the structure that allows people and organizations to perform at their best. I lead through trust, accountability, organization and proactive communication—bringing clarity to complexity, anticipating needs and building systems that help teams succeed.</a:t>
+            </a:r>
+            <a:endParaRPr lang="en-US" sz="2250" b="1" dirty="0">
+              <a:solidFill>
+                <a:srgbClr val="000000"/>
+              </a:solidFill>
+              <a:latin typeface="Canva Sans Bold" panose="020B0604020202020204" charset="0"/>
+              <a:ea typeface="Inter Bold"/>
+              <a:cs typeface="Inter Bold"/>
+              <a:sym typeface="Inter Bold"/>
+            </a:endParaRPr>
           </a:p>
         </p:txBody>
       </p:sp>
